--- a/docs/어스테이지-소개.pptx
+++ b/docs/어스테이지-소개.pptx
@@ -4685,7 +4685,23 @@
                 </a:solidFill>
                 <a:latin typeface="Apple SD Gothic Neo"/>
               </a:rPr>
-              <a:t>· 결과는 예매번호 + 마스킹된 이름·이메일 (#1 김*연 seoy***@…)</a:t>
+              <a:t>· 추첨하면 모달에서 번호가 굴러가고 당첨 번호를 크게 표시</a:t>
+            </a:r>
+          </a:p>
+          <a:p>
+            <a:pPr algn="l">
+              <a:spcAft>
+                <a:spcPts val="1200"/>
+              </a:spcAft>
+            </a:pPr>
+            <a:r>
+              <a:rPr sz="1400" b="0">
+                <a:solidFill>
+                  <a:srgbClr val="6B7C7C"/>
+                </a:solidFill>
+                <a:latin typeface="Apple SD Gothic Neo"/>
+              </a:rPr>
+              <a:t>· 결과는 예매번호 + 마스킹된 이름·이메일 (#4 정*결 hang***@…)</a:t>
             </a:r>
           </a:p>
         </p:txBody>

--- a/docs/어스테이지-소개.pptx
+++ b/docs/어스테이지-소개.pptx
@@ -13,6 +13,8 @@
     <p:sldId id="261" r:id="rId12"/>
     <p:sldId id="262" r:id="rId13"/>
     <p:sldId id="263" r:id="rId14"/>
+    <p:sldId id="264" r:id="rId15"/>
+    <p:sldId id="265" r:id="rId16"/>
   </p:sldIdLst>
   <p:sldSz cx="12192000" cy="6858000" type="screen4x3"/>
   <p:notesSz cx="6858000" cy="9144000"/>
@@ -3214,6 +3216,174 @@
 </p:sld>
 </file>
 
+<file path=ppt/slides/slide10.xml><?xml version="1.0" encoding="utf-8"?>
+<p:sld xmlns:a="http://schemas.openxmlformats.org/drawingml/2006/main" xmlns:p="http://schemas.openxmlformats.org/presentationml/2006/main" xmlns:r="http://schemas.openxmlformats.org/officeDocument/2006/relationships">
+  <p:cSld>
+    <p:bg>
+      <p:bgPr>
+        <a:solidFill>
+          <a:srgbClr val="F7FAFA"/>
+        </a:solidFill>
+        <a:effectLst/>
+      </p:bgPr>
+    </p:bg>
+    <p:spTree>
+      <p:nvGrpSpPr>
+        <p:cNvPr id="1" name=""/>
+        <p:cNvGrpSpPr/>
+        <p:nvPr/>
+      </p:nvGrpSpPr>
+      <p:grpSpPr/>
+      <p:sp>
+        <p:nvSpPr>
+          <p:cNvPr id="2" name="TextBox 1"/>
+          <p:cNvSpPr txBox="1"/>
+          <p:nvPr/>
+        </p:nvSpPr>
+        <p:spPr>
+          <a:xfrm>
+            <a:off x="800000" y="700000"/>
+            <a:ext cx="9700000" cy="5400000"/>
+          </a:xfrm>
+          <a:prstGeom prst="rect">
+            <a:avLst/>
+          </a:prstGeom>
+          <a:noFill/>
+        </p:spPr>
+        <p:txBody>
+          <a:bodyPr wrap="square">
+            <a:spAutoFit/>
+          </a:bodyPr>
+          <a:lstStyle/>
+          <a:p>
+            <a:pPr algn="l">
+              <a:spcAft>
+                <a:spcPts val="1400"/>
+              </a:spcAft>
+            </a:pPr>
+            <a:r>
+              <a:rPr sz="1400" b="1">
+                <a:solidFill>
+                  <a:srgbClr val="2B8A8A"/>
+                </a:solidFill>
+                <a:latin typeface="Apple SD Gothic Neo"/>
+              </a:rPr>
+              <a:t>09 스태프</a:t>
+            </a:r>
+          </a:p>
+          <a:p>
+            <a:pPr algn="l">
+              <a:spcAft>
+                <a:spcPts val="2000"/>
+              </a:spcAft>
+            </a:pPr>
+            <a:r>
+              <a:rPr sz="2600" b="1">
+                <a:solidFill>
+                  <a:srgbClr val="1A2626"/>
+                </a:solidFill>
+                <a:latin typeface="Apple SD Gothic Neo"/>
+              </a:rPr>
+              <a:t>스테이지를 함께 운영할 스태프 지정</a:t>
+            </a:r>
+          </a:p>
+        </p:txBody>
+      </p:sp>
+      <p:sp>
+        <p:nvSpPr>
+          <p:cNvPr id="3" name="TextBox 2"/>
+          <p:cNvSpPr txBox="1"/>
+          <p:nvPr/>
+        </p:nvSpPr>
+        <p:spPr>
+          <a:xfrm>
+            <a:off x="800000" y="2500000"/>
+            <a:ext cx="9700000" cy="3400000"/>
+          </a:xfrm>
+          <a:prstGeom prst="rect">
+            <a:avLst/>
+          </a:prstGeom>
+          <a:noFill/>
+        </p:spPr>
+        <p:txBody>
+          <a:bodyPr wrap="square">
+            <a:spAutoFit/>
+          </a:bodyPr>
+          <a:lstStyle/>
+          <a:p>
+            <a:pPr algn="l">
+              <a:spcAft>
+                <a:spcPts val="1200"/>
+              </a:spcAft>
+            </a:pPr>
+            <a:r>
+              <a:rPr sz="1400" b="0">
+                <a:solidFill>
+                  <a:srgbClr val="6B7C7C"/>
+                </a:solidFill>
+                <a:latin typeface="Apple SD Gothic Neo"/>
+              </a:rPr>
+              <a:t>· 이메일로 초대 → 링크를 열고 로그인하면 참여 (스테이지당 최대 10명)</a:t>
+            </a:r>
+          </a:p>
+          <a:p>
+            <a:pPr algn="l">
+              <a:spcAft>
+                <a:spcPts val="1200"/>
+              </a:spcAft>
+            </a:pPr>
+            <a:r>
+              <a:rPr sz="1400" b="0">
+                <a:solidFill>
+                  <a:srgbClr val="6B7C7C"/>
+                </a:solidFill>
+                <a:latin typeface="Apple SD Gothic Neo"/>
+              </a:rPr>
+              <a:t>· 스태프: 명단 확인 · 입금 확인 · QR 입장 · 현장 예매 · 추첨</a:t>
+            </a:r>
+          </a:p>
+          <a:p>
+            <a:pPr algn="l">
+              <a:spcAft>
+                <a:spcPts val="1200"/>
+              </a:spcAft>
+            </a:pPr>
+            <a:r>
+              <a:rPr sz="1400" b="0">
+                <a:solidFill>
+                  <a:srgbClr val="6B7C7C"/>
+                </a:solidFill>
+                <a:latin typeface="Apple SD Gothic Neo"/>
+              </a:rPr>
+              <a:t>· 주최자만: 스테이지 수정·삭제·상태 전환, 예매 삭제, 스태프 관리</a:t>
+            </a:r>
+          </a:p>
+          <a:p>
+            <a:pPr algn="l">
+              <a:spcAft>
+                <a:spcPts val="1200"/>
+              </a:spcAft>
+            </a:pPr>
+            <a:r>
+              <a:rPr sz="1400" b="0">
+                <a:solidFill>
+                  <a:srgbClr val="6B7C7C"/>
+                </a:solidFill>
+                <a:latin typeface="Apple SD Gothic Neo"/>
+              </a:rPr>
+              <a:t>· 초대 링크는 7일 후 만료 — 제외는 주최자가 즉시, 스태프도 스스로 탈퇴 가능</a:t>
+            </a:r>
+          </a:p>
+        </p:txBody>
+      </p:sp>
+    </p:spTree>
+  </p:cSld>
+  <p:clrMapOvr>
+    <a:masterClrMapping/>
+  </p:clrMapOvr>
+</p:sld>
+</file>
+
 <file path=ppt/slides/slide2.xml><?xml version="1.0" encoding="utf-8"?>
 <p:sld xmlns:a="http://schemas.openxmlformats.org/drawingml/2006/main" xmlns:p="http://schemas.openxmlformats.org/presentationml/2006/main" xmlns:r="http://schemas.openxmlformats.org/officeDocument/2006/relationships">
   <p:cSld>
@@ -3797,7 +3967,23 @@
                 </a:solidFill>
                 <a:latin typeface="Apple SD Gothic Neo"/>
               </a:rPr>
-              <a:t>· 취소 시에도 안내 메일 — 모든 안내는 이메일로만</a:t>
+              <a:t>· 참석자 셀프 취소 시: 참석자에게 취소 완료, 주최자에게 취소 알림</a:t>
+            </a:r>
+          </a:p>
+          <a:p>
+            <a:pPr algn="l">
+              <a:spcAft>
+                <a:spcPts val="1200"/>
+              </a:spcAft>
+            </a:pPr>
+            <a:r>
+              <a:rPr sz="1400" b="0">
+                <a:solidFill>
+                  <a:srgbClr val="6B7C7C"/>
+                </a:solidFill>
+                <a:latin typeface="Apple SD Gothic Neo"/>
+              </a:rPr>
+              <a:t>· 모든 안내는 이메일로만 — 문자는 보내지 않는다</a:t>
             </a:r>
           </a:p>
         </p:txBody>
@@ -4241,7 +4427,23 @@
                 </a:solidFill>
                 <a:latin typeface="Apple SD Gothic Neo"/>
               </a:rPr>
-              <a:t>· 예매번호는 스테이지별 신청 순번(#1, #2 …) — 현장 호명과 추첨에 사용</a:t>
+              <a:t>· 예매번호는 사람 1명당 하나 — 2매 예매면 #2, #3 두 개 발급</a:t>
+            </a:r>
+          </a:p>
+          <a:p>
+            <a:pPr algn="l">
+              <a:spcAft>
+                <a:spcPts val="1200"/>
+              </a:spcAft>
+            </a:pPr>
+            <a:r>
+              <a:rPr sz="1400" b="0">
+                <a:solidFill>
+                  <a:srgbClr val="6B7C7C"/>
+                </a:solidFill>
+                <a:latin typeface="Apple SD Gothic Neo"/>
+              </a:rPr>
+              <a:t>· 현장 호명과 추첨 모두 이 번호(사람 단위)로 진행</a:t>
             </a:r>
           </a:p>
         </p:txBody>
@@ -4755,6 +4957,228 @@
       <p:pic>
         <p:nvPicPr>
           <p:cNvPr id="5" name="Picture 4" descr="08-draw.png"/>
+          <p:cNvPicPr>
+            <a:picLocks noChangeAspect="1"/>
+          </p:cNvPicPr>
+          <p:nvPr/>
+        </p:nvPicPr>
+        <p:blipFill>
+          <a:blip r:embed="rId2"/>
+          <a:stretch>
+            <a:fillRect/>
+          </a:stretch>
+        </p:blipFill>
+        <p:spPr>
+          <a:xfrm>
+            <a:off x="5900000" y="1615789"/>
+            <a:ext cx="5500000" cy="3618421"/>
+          </a:xfrm>
+          <a:prstGeom prst="rect">
+            <a:avLst/>
+          </a:prstGeom>
+        </p:spPr>
+      </p:pic>
+    </p:spTree>
+  </p:cSld>
+  <p:clrMapOvr>
+    <a:masterClrMapping/>
+  </p:clrMapOvr>
+</p:sld>
+</file>
+
+<file path=ppt/slides/slide9.xml><?xml version="1.0" encoding="utf-8"?>
+<p:sld xmlns:a="http://schemas.openxmlformats.org/drawingml/2006/main" xmlns:p="http://schemas.openxmlformats.org/presentationml/2006/main" xmlns:r="http://schemas.openxmlformats.org/officeDocument/2006/relationships">
+  <p:cSld>
+    <p:bg>
+      <p:bgPr>
+        <a:solidFill>
+          <a:srgbClr val="F7FAFA"/>
+        </a:solidFill>
+        <a:effectLst/>
+      </p:bgPr>
+    </p:bg>
+    <p:spTree>
+      <p:nvGrpSpPr>
+        <p:cNvPr id="1" name=""/>
+        <p:cNvGrpSpPr/>
+        <p:nvPr/>
+      </p:nvGrpSpPr>
+      <p:grpSpPr/>
+      <p:sp>
+        <p:nvSpPr>
+          <p:cNvPr id="2" name="TextBox 1"/>
+          <p:cNvSpPr txBox="1"/>
+          <p:nvPr/>
+        </p:nvSpPr>
+        <p:spPr>
+          <a:xfrm>
+            <a:off x="800000" y="700000"/>
+            <a:ext cx="4700000" cy="5400000"/>
+          </a:xfrm>
+          <a:prstGeom prst="rect">
+            <a:avLst/>
+          </a:prstGeom>
+          <a:noFill/>
+        </p:spPr>
+        <p:txBody>
+          <a:bodyPr wrap="square">
+            <a:spAutoFit/>
+          </a:bodyPr>
+          <a:lstStyle/>
+          <a:p>
+            <a:pPr algn="l">
+              <a:spcAft>
+                <a:spcPts val="1400"/>
+              </a:spcAft>
+            </a:pPr>
+            <a:r>
+              <a:rPr sz="1400" b="1">
+                <a:solidFill>
+                  <a:srgbClr val="2B8A8A"/>
+                </a:solidFill>
+                <a:latin typeface="Apple SD Gothic Neo"/>
+              </a:rPr>
+              <a:t>08 현장 예매</a:t>
+            </a:r>
+          </a:p>
+          <a:p>
+            <a:pPr algn="l">
+              <a:spcAft>
+                <a:spcPts val="2000"/>
+              </a:spcAft>
+            </a:pPr>
+            <a:r>
+              <a:rPr sz="2600" b="1">
+                <a:solidFill>
+                  <a:srgbClr val="1A2626"/>
+                </a:solidFill>
+                <a:latin typeface="Apple SD Gothic Neo"/>
+              </a:rPr>
+              <a:t>당일 현장에서 받은 예매도 같은 명단에</a:t>
+            </a:r>
+          </a:p>
+        </p:txBody>
+      </p:sp>
+      <p:sp>
+        <p:nvSpPr>
+          <p:cNvPr id="3" name="TextBox 2"/>
+          <p:cNvSpPr txBox="1"/>
+          <p:nvPr/>
+        </p:nvSpPr>
+        <p:spPr>
+          <a:xfrm>
+            <a:off x="800000" y="2500000"/>
+            <a:ext cx="4700000" cy="3400000"/>
+          </a:xfrm>
+          <a:prstGeom prst="rect">
+            <a:avLst/>
+          </a:prstGeom>
+          <a:noFill/>
+        </p:spPr>
+        <p:txBody>
+          <a:bodyPr wrap="square">
+            <a:spAutoFit/>
+          </a:bodyPr>
+          <a:lstStyle/>
+          <a:p>
+            <a:pPr algn="l">
+              <a:spcAft>
+                <a:spcPts val="1200"/>
+              </a:spcAft>
+            </a:pPr>
+            <a:r>
+              <a:rPr sz="1400" b="0">
+                <a:solidFill>
+                  <a:srgbClr val="6B7C7C"/>
+                </a:solidFill>
+                <a:latin typeface="Apple SD Gothic Neo"/>
+              </a:rPr>
+              <a:t>· 이름·이메일·매수만 입력 — 예매가 마감된 뒤에도 등록 가능</a:t>
+            </a:r>
+          </a:p>
+          <a:p>
+            <a:pPr algn="l">
+              <a:spcAft>
+                <a:spcPts val="1200"/>
+              </a:spcAft>
+            </a:pPr>
+            <a:r>
+              <a:rPr sz="1400" b="0">
+                <a:solidFill>
+                  <a:srgbClr val="6B7C7C"/>
+                </a:solidFill>
+                <a:latin typeface="Apple SD Gothic Neo"/>
+              </a:rPr>
+              <a:t>· '바로 입금확인'으로 만들면 입장 QR 메일이 즉시 발송</a:t>
+            </a:r>
+          </a:p>
+          <a:p>
+            <a:pPr algn="l">
+              <a:spcAft>
+                <a:spcPts val="1200"/>
+              </a:spcAft>
+            </a:pPr>
+            <a:r>
+              <a:rPr sz="1400" b="0">
+                <a:solidFill>
+                  <a:srgbClr val="6B7C7C"/>
+                </a:solidFill>
+                <a:latin typeface="Apple SD Gothic Neo"/>
+              </a:rPr>
+              <a:t>· 조회용 비밀번호 4자리는 자동 생성 — 그 자리에서 안내</a:t>
+            </a:r>
+          </a:p>
+        </p:txBody>
+      </p:sp>
+      <p:sp>
+        <p:nvSpPr>
+          <p:cNvPr id="4" name="Rectangle 3"/>
+          <p:cNvSpPr/>
+          <p:nvPr/>
+        </p:nvSpPr>
+        <p:spPr>
+          <a:xfrm>
+            <a:off x="5840000" y="1555789"/>
+            <a:ext cx="5620000" cy="3738421"/>
+          </a:xfrm>
+          <a:prstGeom prst="rect">
+            <a:avLst/>
+          </a:prstGeom>
+          <a:solidFill>
+            <a:srgbClr val="FFFFFF"/>
+          </a:solidFill>
+          <a:ln>
+            <a:solidFill>
+              <a:srgbClr val="E3ECEC"/>
+            </a:solidFill>
+          </a:ln>
+          <a:effectLst/>
+        </p:spPr>
+        <p:style>
+          <a:lnRef idx="1">
+            <a:schemeClr val="accent1"/>
+          </a:lnRef>
+          <a:fillRef idx="3">
+            <a:schemeClr val="accent1"/>
+          </a:fillRef>
+          <a:effectRef idx="2">
+            <a:schemeClr val="accent1"/>
+          </a:effectRef>
+          <a:fontRef idx="minor">
+            <a:schemeClr val="lt1"/>
+          </a:fontRef>
+        </p:style>
+        <p:txBody>
+          <a:bodyPr rtlCol="0" anchor="ctr"/>
+          <a:lstStyle/>
+          <a:p>
+            <a:pPr algn="ctr"/>
+          </a:p>
+        </p:txBody>
+      </p:sp>
+      <p:pic>
+        <p:nvPicPr>
+          <p:cNvPr id="5" name="Picture 4" descr="09-onsite.png"/>
           <p:cNvPicPr>
             <a:picLocks noChangeAspect="1"/>
           </p:cNvPicPr>

--- a/docs/어스테이지-소개.pptx
+++ b/docs/어스테이지-소개.pptx
@@ -3243,7 +3243,7 @@
         <p:spPr>
           <a:xfrm>
             <a:off x="800000" y="700000"/>
-            <a:ext cx="9700000" cy="5400000"/>
+            <a:ext cx="4700000" cy="5400000"/>
           </a:xfrm>
           <a:prstGeom prst="rect">
             <a:avLst/>
@@ -3298,7 +3298,7 @@
         <p:spPr>
           <a:xfrm>
             <a:off x="800000" y="2500000"/>
-            <a:ext cx="9700000" cy="3400000"/>
+            <a:ext cx="4700000" cy="3400000"/>
           </a:xfrm>
           <a:prstGeom prst="rect">
             <a:avLst/>
@@ -3376,6 +3376,76 @@
           </a:p>
         </p:txBody>
       </p:sp>
+      <p:sp>
+        <p:nvSpPr>
+          <p:cNvPr id="4" name="Rectangle 3"/>
+          <p:cNvSpPr/>
+          <p:nvPr/>
+        </p:nvSpPr>
+        <p:spPr>
+          <a:xfrm>
+            <a:off x="5840000" y="1555789"/>
+            <a:ext cx="5620000" cy="3738421"/>
+          </a:xfrm>
+          <a:prstGeom prst="rect">
+            <a:avLst/>
+          </a:prstGeom>
+          <a:solidFill>
+            <a:srgbClr val="FFFFFF"/>
+          </a:solidFill>
+          <a:ln>
+            <a:solidFill>
+              <a:srgbClr val="E3ECEC"/>
+            </a:solidFill>
+          </a:ln>
+          <a:effectLst/>
+        </p:spPr>
+        <p:style>
+          <a:lnRef idx="1">
+            <a:schemeClr val="accent1"/>
+          </a:lnRef>
+          <a:fillRef idx="3">
+            <a:schemeClr val="accent1"/>
+          </a:fillRef>
+          <a:effectRef idx="2">
+            <a:schemeClr val="accent1"/>
+          </a:effectRef>
+          <a:fontRef idx="minor">
+            <a:schemeClr val="lt1"/>
+          </a:fontRef>
+        </p:style>
+        <p:txBody>
+          <a:bodyPr rtlCol="0" anchor="ctr"/>
+          <a:lstStyle/>
+          <a:p>
+            <a:pPr algn="ctr"/>
+          </a:p>
+        </p:txBody>
+      </p:sp>
+      <p:pic>
+        <p:nvPicPr>
+          <p:cNvPr id="5" name="Picture 4" descr="11-staff.png"/>
+          <p:cNvPicPr>
+            <a:picLocks noChangeAspect="1"/>
+          </p:cNvPicPr>
+          <p:nvPr/>
+        </p:nvPicPr>
+        <p:blipFill>
+          <a:blip r:embed="rId2"/>
+          <a:stretch>
+            <a:fillRect/>
+          </a:stretch>
+        </p:blipFill>
+        <p:spPr>
+          <a:xfrm>
+            <a:off x="5900000" y="1615789"/>
+            <a:ext cx="5500000" cy="3618421"/>
+          </a:xfrm>
+          <a:prstGeom prst="rect">
+            <a:avLst/>
+          </a:prstGeom>
+        </p:spPr>
+      </p:pic>
     </p:spTree>
   </p:cSld>
   <p:clrMapOvr>
